--- a/week-07/presentations/ppts/day-01-delivery-outcomes-agile-principles.pptx
+++ b/week-07/presentations/ppts/day-01-delivery-outcomes-agile-principles.pptx
@@ -5341,6 +5341,44 @@
             <a:r>
               <a:rPr/>
               <a:t>📋 Outcome Map Structure</a:t>
+            </a:r>
+          </a:p>
+        </p:txBody>
+      </p:sp>
+      <p:sp>
+        <p:nvSpPr>
+          <p:cNvPr id="3" name="Content Placeholder 2"/>
+          <p:cNvSpPr>
+            <a:spLocks noGrp="1"/>
+          </p:cNvSpPr>
+          <p:nvPr>
+            <p:ph idx="1"/>
+          </p:nvPr>
+        </p:nvSpPr>
+        <p:spPr/>
+        <p:txBody>
+          <a:bodyPr/>
+          <a:lstStyle/>
+          <a:p>
+            <a:pPr lvl="0" indent="0">
+              <a:buNone/>
+            </a:pPr>
+            <a:r>
+              <a:rPr>
+                <a:latin typeface="Courier"/>
+              </a:rPr>
+              <a:t>### Primary outcome
+&lt;user-visible outcome&gt;
+Tied to: &lt;NS / KPI from Tier Sheet&gt;
+Target movement: &lt;baseline → target&gt; by &lt;timeline&gt;
+Leading indicator: &lt;what we'd watch first&gt;
+### Supporting outcomes (2–4)
+For each: &lt;outcome&gt; / Tied to: ... / Why it matters: ...
+### Counter-outcomes (the guardrails)
+&lt;outcome we DON'T want — if this happens, we won for the
+wrong reasons&gt;
+### What this feature explicitly does NOT outcome on
+&lt;claims we are NOT making — usually pulled from PRD §3 non-goals&gt;</a:t>
             </a:r>
           </a:p>
         </p:txBody>

--- a/week-07/presentations/ppts/day-01-delivery-outcomes-agile-principles.pptx
+++ b/week-07/presentations/ppts/day-01-delivery-outcomes-agile-principles.pptx
@@ -1448,7 +1448,7 @@
             </a:pPr>
             <a:r>
               <a:rPr/>
-              <a:t>By 16:00, every triad has DP §1.</a:t>
+              <a:t>By 16:00, every triad has DP Section 1.</a:t>
             </a:r>
           </a:p>
         </p:txBody>
@@ -5378,7 +5378,7 @@
 &lt;outcome we DON'T want — if this happens, we won for the
 wrong reasons&gt;
 ### What this feature explicitly does NOT outcome on
-&lt;claims we are NOT making — usually pulled from PRD §3 non-goals&gt;</a:t>
+&lt;claims we are NOT making — usually pulled from PRD Section 3 non-goals&gt;</a:t>
             </a:r>
           </a:p>
         </p:txBody>
@@ -6360,7 +6360,7 @@
             </a:pPr>
             <a:r>
               <a:rPr/>
-              <a:t>🧿 AI Sanity Check</a:t>
+              <a:t>🤖 AI Sanity Check</a:t>
             </a:r>
           </a:p>
         </p:txBody>
@@ -6588,7 +6588,7 @@
             </a:pPr>
             <a:r>
               <a:rPr/>
-              <a:t>DP §1 drafted</a:t>
+              <a:t>DP Section 1 drafted</a:t>
             </a:r>
           </a:p>
           <a:p>
@@ -6642,7 +6642,7 @@
             </a:pPr>
             <a:r>
               <a:rPr/>
-              <a:t>Bring to Day 2: DP §1 + ADO access. Tomorrow we load the backlog.</a:t>
+              <a:t>Bring to Day 2: DP Section 1 + ADO access. Tomorrow we load the backlog.</a:t>
             </a:r>
           </a:p>
         </p:txBody>
@@ -6825,7 +6825,7 @@
             </a:pPr>
             <a:r>
               <a:rPr/>
-              <a:t>Draft DP §1 — Outcome Map</a:t>
+              <a:t>Draft DP Section 1 — Outcome Map</a:t>
             </a:r>
           </a:p>
         </p:txBody>

--- a/week-07/presentations/ppts/day-01-delivery-outcomes-agile-principles.pptx
+++ b/week-07/presentations/ppts/day-01-delivery-outcomes-agile-principles.pptx
@@ -5360,6 +5360,15 @@
           <a:bodyPr/>
           <a:lstStyle/>
           <a:p>
+            <a:pPr lvl="0" indent="0" marL="0">
+              <a:buNone/>
+            </a:pPr>
+            <a:r>
+              <a:rPr/>
+              <a:t>Each outcome ties to a key performance indicator (KPI) from the Tier Sheet.</a:t>
+            </a:r>
+          </a:p>
+          <a:p>
             <a:pPr lvl="0" indent="0">
               <a:buNone/>
             </a:pPr>
@@ -5809,7 +5818,7 @@
             </a:pPr>
             <a:r>
               <a:rPr/>
-              <a:t>Not “no documentation” — PRDs/TCDs/TMDs/SEPs are valuable; they support working software</a:t>
+              <a:t>Not “no documentation” — the Product Requirements Document (PRD), Technical Concept Document (TCD), Technical Modeling Document (TMD), and Stakeholder Engagement Plan (SEP) are valuable; they support working software</a:t>
             </a:r>
           </a:p>
           <a:p>
@@ -6606,7 +6615,7 @@
             </a:pPr>
             <a:r>
               <a:rPr/>
-              <a:t>ADO Usage (hands-on)</a:t>
+              <a:t>Azure DevOps (ADO) Usage (hands-on)</a:t>
             </a:r>
           </a:p>
           <a:p>
@@ -6825,7 +6834,7 @@
             </a:pPr>
             <a:r>
               <a:rPr/>
-              <a:t>Draft DP Section 1 — Outcome Map</a:t>
+              <a:t>Draft Delivery Plan (DP) Section 1 — Outcome Map</a:t>
             </a:r>
           </a:p>
         </p:txBody>

--- a/week-07/presentations/ppts/day-01-delivery-outcomes-agile-principles.pptx
+++ b/week-07/presentations/ppts/day-01-delivery-outcomes-agile-principles.pptx
@@ -5439,6 +5439,46 @@
           </a:p>
         </p:txBody>
       </p:sp>
+      <p:sp>
+        <p:nvSpPr>
+          <p:cNvPr id="3" name="Content Placeholder 2"/>
+          <p:cNvSpPr>
+            <a:spLocks noGrp="1"/>
+          </p:cNvSpPr>
+          <p:nvPr>
+            <p:ph idx="1"/>
+          </p:nvPr>
+        </p:nvSpPr>
+        <p:spPr/>
+        <p:txBody>
+          <a:bodyPr/>
+          <a:lstStyle/>
+          <a:p>
+            <a:pPr lvl="0" indent="0">
+              <a:buNone/>
+            </a:pPr>
+            <a:r>
+              <a:rPr>
+                <a:latin typeface="Courier"/>
+              </a:rPr>
+              <a:t>Primary: Median dispatcher reconcile time drops from 45 min
+to ≤ 12 min within 30 days of launch.
+Tied to: Tier Sheet primary metric.
+Leading: % of reconcile-flow runs that complete on
+first attempt (target ≥ 80% by week 2).
+Supporting:
+- Reconcile-flow abandonment drops to ≤ 5%
+- Manual override entries per dispatcher drop ≥ 50%
+- Mobile reconcile adoption climbs to ≥ 70% of accounts
+Counter-outcome: Support tickets about reconcile flow rise
+&gt; 20%. (If we won the primary by adding new pain.)
+Explicitly NOT outcoming on:
+- Tablet adoption (out of scope this iteration)
+- Multi-shop manager view metrics (different feature)</a:t>
+            </a:r>
+          </a:p>
+        </p:txBody>
+      </p:sp>
     </p:spTree>
   </p:cSld>
 </p:sld>
@@ -6370,6 +6410,41 @@
             <a:r>
               <a:rPr/>
               <a:t>🤖 AI Sanity Check</a:t>
+            </a:r>
+          </a:p>
+        </p:txBody>
+      </p:sp>
+      <p:sp>
+        <p:nvSpPr>
+          <p:cNvPr id="3" name="Content Placeholder 2"/>
+          <p:cNvSpPr>
+            <a:spLocks noGrp="1"/>
+          </p:cNvSpPr>
+          <p:nvPr>
+            <p:ph idx="1"/>
+          </p:nvPr>
+        </p:nvSpPr>
+        <p:spPr/>
+        <p:txBody>
+          <a:bodyPr/>
+          <a:lstStyle/>
+          <a:p>
+            <a:pPr lvl="0" indent="0">
+              <a:buNone/>
+            </a:pPr>
+            <a:r>
+              <a:rPr>
+                <a:latin typeface="Courier"/>
+              </a:rPr>
+              <a:t>Role: Senior PM coaching outcome thinking.
+Context: &lt;paste the outcome map&gt;
+Task: Identify where outputs are masquerading as outcomes,
+where outcomes are too vague to measure, and any
+counter-outcome that could be gamed.
+Constraints:
+- Be specific to statements given
+- Suggest a concrete rewrite
+Format: 3 numbered findings.</a:t>
             </a:r>
           </a:p>
         </p:txBody>

--- a/week-07/presentations/ppts/day-01-delivery-outcomes-agile-principles.pptx
+++ b/week-07/presentations/ppts/day-01-delivery-outcomes-agile-principles.pptx
@@ -710,7 +710,7 @@
             </a:pPr>
             <a:r>
               <a:rPr/>
-              <a:t>If a triad lists 8+ supporting outcomes, force a cull. 4 max.</a:t>
+              <a:t>If a quad lists 8+ supporting outcomes, force a cull. 4 max.</a:t>
             </a:r>
           </a:p>
         </p:txBody>
@@ -1284,7 +1284,7 @@
             </a:pPr>
             <a:r>
               <a:rPr/>
-              <a:t>Reviewer triads ask these 4. Author triad listens; same Wk-3 review discipline.</a:t>
+              <a:t>Reviewer quads ask these 4. Author quad listens; same Wk-3 review discipline.</a:t>
             </a:r>
           </a:p>
         </p:txBody>
@@ -1448,7 +1448,7 @@
             </a:pPr>
             <a:r>
               <a:rPr/>
-              <a:t>By 16:00, every triad has DP Section 1.</a:t>
+              <a:t>By 16:00, every quad has DP Section 1.</a:t>
             </a:r>
           </a:p>
         </p:txBody>
@@ -5549,7 +5549,7 @@
             </a:pPr>
             <a:r>
               <a:rPr b="1"/>
-              <a:t>Triads • 40 minutes</a:t>
+              <a:t>Quads • 40 minutes</a:t>
             </a:r>
           </a:p>
           <a:p>
@@ -6077,7 +6077,7 @@
             </a:pPr>
             <a:r>
               <a:rPr b="1"/>
-              <a:t>Triads • 40 minutes</a:t>
+              <a:t>Quads • 40 minutes</a:t>
             </a:r>
           </a:p>
           <a:p>
@@ -6104,7 +6104,7 @@
             </a:pPr>
             <a:r>
               <a:rPr/>
-              <a:t>8 min: synthesis — which value did your triad invoke most?</a:t>
+              <a:t>8 min: synthesis — which value did your quad invoke most?</a:t>
             </a:r>
           </a:p>
           <a:p>
@@ -6519,7 +6519,7 @@
             </a:pPr>
             <a:r>
               <a:rPr b="1"/>
-              <a:t>Triad pairs • 45 minutes • Wrap</a:t>
+              <a:t>Quad pairs • 45 minutes • Wrap</a:t>
             </a:r>
           </a:p>
           <a:p>
@@ -6537,7 +6537,7 @@
             </a:pPr>
             <a:r>
               <a:rPr/>
-              <a:t>15 min: author-triad revisions</a:t>
+              <a:t>15 min: author-quad revisions</a:t>
             </a:r>
           </a:p>
           <a:p>
@@ -7545,7 +7545,7 @@
             </a:pPr>
             <a:r>
               <a:rPr b="1"/>
-              <a:t>Triads • 35 minutes</a:t>
+              <a:t>Quads • 35 minutes</a:t>
             </a:r>
           </a:p>
           <a:p>

--- a/week-07/presentations/ppts/day-01-delivery-outcomes-agile-principles.pptx
+++ b/week-07/presentations/ppts/day-01-delivery-outcomes-agile-principles.pptx
@@ -5549,7 +5549,7 @@
             </a:pPr>
             <a:r>
               <a:rPr b="1"/>
-              <a:t>Quads • 40 minutes</a:t>
+              <a:t>Quads • 50 minutes</a:t>
             </a:r>
           </a:p>
           <a:p>
@@ -6077,7 +6077,7 @@
             </a:pPr>
             <a:r>
               <a:rPr b="1"/>
-              <a:t>Quads • 40 minutes</a:t>
+              <a:t>Quads • 50 minutes</a:t>
             </a:r>
           </a:p>
           <a:p>
@@ -6519,7 +6519,7 @@
             </a:pPr>
             <a:r>
               <a:rPr b="1"/>
-              <a:t>Quad pairs • 45 minutes • Wrap</a:t>
+              <a:t>Quad pairs • 55 minutes • Wrap</a:t>
             </a:r>
           </a:p>
           <a:p>
@@ -7545,7 +7545,7 @@
             </a:pPr>
             <a:r>
               <a:rPr b="1"/>
-              <a:t>Quads • 35 minutes</a:t>
+              <a:t>Quads • 45 minutes</a:t>
             </a:r>
           </a:p>
           <a:p>

--- a/week-07/presentations/ppts/day-01-delivery-outcomes-agile-principles.pptx
+++ b/week-07/presentations/ppts/day-01-delivery-outcomes-agile-principles.pptx
@@ -5558,7 +5558,7 @@
             </a:pPr>
             <a:r>
               <a:rPr/>
-              <a:t>10 min: pull primary outcome from NS / Tier Sheet</a:t>
+              <a:t>20 min: pull primary outcome from NS / Tier Sheet</a:t>
             </a:r>
           </a:p>
           <a:p>
@@ -5603,7 +5603,7 @@
             </a:pPr>
             <a:r>
               <a:rPr/>
-              <a:t>⏱ 10 + 10 + 10 + 5 + 5</a:t>
+              <a:t>⏱ 20 + 10 + 10 + 5 + 5</a:t>
             </a:r>
           </a:p>
         </p:txBody>
@@ -6095,7 +6095,7 @@
             </a:pPr>
             <a:r>
               <a:rPr/>
-              <a:t>32 min: 4 scenarios × 8 min each</a:t>
+              <a:t>42 min: 4 scenarios × 8 min each</a:t>
             </a:r>
           </a:p>
           <a:p>
@@ -6528,7 +6528,7 @@
             </a:pPr>
             <a:r>
               <a:rPr/>
-              <a:t>20 min: cross-review with 4 questions</a:t>
+              <a:t>30 min: cross-review with 4 questions</a:t>
             </a:r>
           </a:p>
           <a:p>
@@ -6555,7 +6555,7 @@
             </a:pPr>
             <a:r>
               <a:rPr/>
-              <a:t>⏱ 20 + 15 + 10 · 15-min wrap</a:t>
+              <a:t>⏱ 30 + 15 + 10 · 15-min wrap</a:t>
             </a:r>
           </a:p>
         </p:txBody>
@@ -7563,7 +7563,7 @@
             </a:pPr>
             <a:r>
               <a:rPr/>
-              <a:t>15 min: label all 12</a:t>
+              <a:t>25 min: label all 12</a:t>
             </a:r>
           </a:p>
           <a:p>
@@ -7590,7 +7590,7 @@
             </a:pPr>
             <a:r>
               <a:rPr/>
-              <a:t>⏱ 15 + 15 + 5</a:t>
+              <a:t>⏱ 25 + 15 + 5</a:t>
             </a:r>
           </a:p>
         </p:txBody>
